--- a/vault/blogs/cloudflare-agents-week-2026-explained/slides.pptx
+++ b/vault/blogs/cloudflare-agents-week-2026-explained/slides.pptx
@@ -3677,7 +3677,7 @@
                   <a:srgbClr val="FFFFFF"/>
                 </a:solidFill>
               </a:rPr>
-              <a:t>  This architectural shift aligns with the [[glossary/mcp|Model Context Protocol (MCP)]], which now requires RFC 9728 supp</a:t>
+              <a:t>  This architectural shift aligns with the Model Context Protocol (MCP), which now requires RFC 9728 support for secure to</a:t>
             </a:r>
           </a:p>
         </p:txBody>

--- a/vault/blogs/cloudflare-agents-week-2026-explained/slides.pptx
+++ b/vault/blogs/cloudflare-agents-week-2026-explained/slides.pptx
@@ -3848,7 +3848,7 @@
                   <a:srgbClr val="FFFFFF"/>
                 </a:solidFill>
               </a:rPr>
-              <a:t>  Agents that can only talk are limited; agents that can act are transformative. However, giving an AI model the ability t</a:t>
+              <a:t>  Agents that can only talk are limited;</a:t>
             </a:r>
           </a:p>
         </p:txBody>
@@ -3882,7 +3882,7 @@
                   <a:srgbClr val="FFFFFF"/>
                 </a:solidFill>
               </a:rPr>
-              <a:t>  Dynamic Workers allow developers to spawn lightweight, short-lived compute instances on the fly. Unlike traditional Work</a:t>
+              <a:t>  agents that can act are transformative.</a:t>
             </a:r>
           </a:p>
         </p:txBody>
@@ -3890,6 +3890,74 @@
       <p:sp>
         <p:nvSpPr>
           <p:cNvPr id="6" name="TextBox 5"/>
+          <p:cNvSpPr txBox="1"/>
+          <p:nvPr/>
+        </p:nvSpPr>
+        <p:spPr>
+          <a:xfrm>
+            <a:off x="731520" y="3703320"/>
+            <a:ext cx="10698480" cy="960120"/>
+          </a:xfrm>
+          <a:prstGeom prst="rect">
+            <a:avLst/>
+          </a:prstGeom>
+          <a:noFill/>
+        </p:spPr>
+        <p:txBody>
+          <a:bodyPr wrap="square">
+            <a:spAutoFit/>
+          </a:bodyPr>
+          <a:lstStyle/>
+          <a:p>
+            <a:pPr algn="l"/>
+            <a:r>
+              <a:rPr sz="1700" b="0">
+                <a:solidFill>
+                  <a:srgbClr val="FFFFFF"/>
+                </a:solidFill>
+              </a:rPr>
+              <a:t>  However, giving an AI model the ability t</a:t>
+            </a:r>
+          </a:p>
+        </p:txBody>
+      </p:sp>
+      <p:sp>
+        <p:nvSpPr>
+          <p:cNvPr id="7" name="TextBox 6"/>
+          <p:cNvSpPr txBox="1"/>
+          <p:nvPr/>
+        </p:nvSpPr>
+        <p:spPr>
+          <a:xfrm>
+            <a:off x="731520" y="4754880"/>
+            <a:ext cx="10698480" cy="960120"/>
+          </a:xfrm>
+          <a:prstGeom prst="rect">
+            <a:avLst/>
+          </a:prstGeom>
+          <a:noFill/>
+        </p:spPr>
+        <p:txBody>
+          <a:bodyPr wrap="square">
+            <a:spAutoFit/>
+          </a:bodyPr>
+          <a:lstStyle/>
+          <a:p>
+            <a:pPr algn="l"/>
+            <a:r>
+              <a:rPr sz="1700" b="0">
+                <a:solidFill>
+                  <a:srgbClr val="FFFFFF"/>
+                </a:solidFill>
+              </a:rPr>
+              <a:t>  Dynamic Workers allow developers to spawn lightweight, short-lived compute instances on the fly.</a:t>
+            </a:r>
+          </a:p>
+        </p:txBody>
+      </p:sp>
+      <p:sp>
+        <p:nvSpPr>
+          <p:cNvPr id="8" name="TextBox 7"/>
           <p:cNvSpPr txBox="1"/>
           <p:nvPr/>
         </p:nvSpPr>
@@ -4053,7 +4121,7 @@
                   <a:srgbClr val="FFFFFF"/>
                 </a:solidFill>
               </a:rPr>
-              <a:t>  One of the hardest parts of building agents is state management. How does an agent remember its progress across sessions</a:t>
+              <a:t>  One of the hardest parts of building agents is state management.</a:t>
             </a:r>
           </a:p>
         </p:txBody>
@@ -4087,7 +4155,7 @@
                   <a:srgbClr val="FFFFFF"/>
                 </a:solidFill>
               </a:rPr>
-              <a:t>  Artifacts allows agents to create tens of millions of repositories for code, data, and state. Because it is Git-compatib</a:t>
+              <a:t>  How does an agent remember its progress across sessions</a:t>
             </a:r>
           </a:p>
         </p:txBody>
@@ -4095,6 +4163,74 @@
       <p:sp>
         <p:nvSpPr>
           <p:cNvPr id="6" name="TextBox 5"/>
+          <p:cNvSpPr txBox="1"/>
+          <p:nvPr/>
+        </p:nvSpPr>
+        <p:spPr>
+          <a:xfrm>
+            <a:off x="731520" y="3703320"/>
+            <a:ext cx="10698480" cy="960120"/>
+          </a:xfrm>
+          <a:prstGeom prst="rect">
+            <a:avLst/>
+          </a:prstGeom>
+          <a:noFill/>
+        </p:spPr>
+        <p:txBody>
+          <a:bodyPr wrap="square">
+            <a:spAutoFit/>
+          </a:bodyPr>
+          <a:lstStyle/>
+          <a:p>
+            <a:pPr algn="l"/>
+            <a:r>
+              <a:rPr sz="1700" b="0">
+                <a:solidFill>
+                  <a:srgbClr val="FFFFFF"/>
+                </a:solidFill>
+              </a:rPr>
+              <a:t>  Artifacts allows agents to create tens of millions of repositories for code, data, and state.</a:t>
+            </a:r>
+          </a:p>
+        </p:txBody>
+      </p:sp>
+      <p:sp>
+        <p:nvSpPr>
+          <p:cNvPr id="7" name="TextBox 6"/>
+          <p:cNvSpPr txBox="1"/>
+          <p:nvPr/>
+        </p:nvSpPr>
+        <p:spPr>
+          <a:xfrm>
+            <a:off x="731520" y="4754880"/>
+            <a:ext cx="10698480" cy="960120"/>
+          </a:xfrm>
+          <a:prstGeom prst="rect">
+            <a:avLst/>
+          </a:prstGeom>
+          <a:noFill/>
+        </p:spPr>
+        <p:txBody>
+          <a:bodyPr wrap="square">
+            <a:spAutoFit/>
+          </a:bodyPr>
+          <a:lstStyle/>
+          <a:p>
+            <a:pPr algn="l"/>
+            <a:r>
+              <a:rPr sz="1700" b="0">
+                <a:solidFill>
+                  <a:srgbClr val="FFFFFF"/>
+                </a:solidFill>
+              </a:rPr>
+              <a:t>  Because it is Git-compatib</a:t>
+            </a:r>
+          </a:p>
+        </p:txBody>
+      </p:sp>
+      <p:sp>
+        <p:nvSpPr>
+          <p:cNvPr id="8" name="TextBox 7"/>
           <p:cNvSpPr txBox="1"/>
           <p:nvPr/>
         </p:nvSpPr>
@@ -4292,7 +4428,7 @@
                   <a:srgbClr val="FFFFFF"/>
                 </a:solidFill>
               </a:rPr>
-              <a:t>  Agents are also becoming multi-channel. The launch of Email for Agents in public beta allows AI agents to send, receive,</a:t>
+              <a:t>  Agents are also becoming multi-channel.</a:t>
             </a:r>
           </a:p>
         </p:txBody>
@@ -4300,6 +4436,40 @@
       <p:sp>
         <p:nvSpPr>
           <p:cNvPr id="6" name="TextBox 5"/>
+          <p:cNvSpPr txBox="1"/>
+          <p:nvPr/>
+        </p:nvSpPr>
+        <p:spPr>
+          <a:xfrm>
+            <a:off x="731520" y="3703320"/>
+            <a:ext cx="10698480" cy="960120"/>
+          </a:xfrm>
+          <a:prstGeom prst="rect">
+            <a:avLst/>
+          </a:prstGeom>
+          <a:noFill/>
+        </p:spPr>
+        <p:txBody>
+          <a:bodyPr wrap="square">
+            <a:spAutoFit/>
+          </a:bodyPr>
+          <a:lstStyle/>
+          <a:p>
+            <a:pPr algn="l"/>
+            <a:r>
+              <a:rPr sz="1700" b="0">
+                <a:solidFill>
+                  <a:srgbClr val="FFFFFF"/>
+                </a:solidFill>
+              </a:rPr>
+              <a:t>  The launch of Email for Agents in public beta allows AI agents to send, receive,</a:t>
+            </a:r>
+          </a:p>
+        </p:txBody>
+      </p:sp>
+      <p:sp>
+        <p:nvSpPr>
+          <p:cNvPr id="7" name="TextBox 6"/>
           <p:cNvSpPr txBox="1"/>
           <p:nvPr/>
         </p:nvSpPr>
@@ -4433,8 +4603,8 @@
         </p:nvSpPr>
         <p:spPr>
           <a:xfrm>
-            <a:off x="914400" y="6263640"/>
-            <a:ext cx="10332720" cy="365760"/>
+            <a:off x="731520" y="6263640"/>
+            <a:ext cx="10698480" cy="365760"/>
           </a:xfrm>
           <a:prstGeom prst="rect">
             <a:avLst/>
@@ -4447,14 +4617,14 @@
           </a:bodyPr>
           <a:lstStyle/>
           <a:p>
-            <a:pPr algn="ctr"/>
-            <a:r>
-              <a:rPr sz="1200" b="0">
+            <a:pPr algn="l"/>
+            <a:r>
+              <a:rPr sz="1000" b="0">
                 <a:solidFill>
                   <a:srgbClr val="A1A1AA"/>
                 </a:solidFill>
               </a:rPr>
-              <a:t>Koenig AI Academy</a:t>
+              <a:t>academy.kspl.tech | Koenig AI Academy</a:t>
             </a:r>
           </a:p>
         </p:txBody>
